--- a/resources/pptx/pre-pdhpe-s3.pptx
+++ b/resources/pptx/pre-pdhpe-s3.pptx
@@ -3899,7 +3899,7 @@
                 </a:solidFill>
                 <a:latin typeface="Calibri"/>
               </a:rPr>
-              <a:t>Describe one animal movement you observed today using at least two biomechanical terms.</a:t>
+              <a:t>Describe one animal movement you observed at Taronga Zoo using at least two biomechanical terms.</a:t>
             </a:r>
           </a:p>
         </p:txBody>
@@ -5363,7 +5363,7 @@
                 </a:solidFill>
                 <a:latin typeface="Calibri"/>
               </a:rPr>
-              <a:t>Insert a short clip introducing the animals students will observe today.
+              <a:t>Insert a short clip introducing the animals students will observe on the excursion.
 Suggested: Taronga keeper video, National Geographic clip, or animal documentary excerpt.
 Aim for 2–4 minutes — pause at key moments to discuss.</a:t>
             </a:r>
@@ -8582,7 +8582,7 @@
                 </a:solidFill>
                 <a:latin typeface="Calibri"/>
               </a:rPr>
-              <a:t>You have 60 seconds to draw an animal from today's visit. Show your class and see if they can guess it!</a:t>
+              <a:t>You have 60 seconds to draw a Taronga Zoo animal. Show your class and see if they can guess it!</a:t>
             </a:r>
           </a:p>
         </p:txBody>
